--- a/docs/答辩演示.pptx
+++ b/docs/答辩演示.pptx
@@ -27290,9 +27290,9 @@
         <p:grpSpPr>
           <a:xfrm>
             <a:off x="609600" y="476250"/>
-            <a:ext cx="10702528" cy="652462"/>
+            <a:ext cx="10702528" cy="600685"/>
             <a:chOff x="609600" y="476250"/>
-            <a:chExt cx="10702528" cy="652462"/>
+            <a:chExt cx="10702528" cy="600685"/>
           </a:xfrm>
         </p:grpSpPr>
         <p:sp>
@@ -27328,7 +27328,7 @@
           <p:spPr>
             <a:xfrm>
               <a:off x="788670" y="502920"/>
-              <a:ext cx="3373374" cy="487680"/>
+              <a:ext cx="1231106" cy="369332"/>
             </a:xfrm>
             <a:prstGeom prst="rect">
               <a:avLst/>
@@ -27354,7 +27354,7 @@
                   <a:ea typeface="微软雅黑" panose="020B0503020204020204" charset="-122"/>
                   <a:cs typeface="Segoe UI" panose="020B0502040204020203"/>
                 </a:rPr>
-                <a:t>系统边界与未来工作</a:t>
+                <a:t>未来工作</a:t>
               </a:r>
             </a:p>
           </p:txBody>
@@ -27368,7 +27368,7 @@
           <p:spPr>
             <a:xfrm>
               <a:off x="824865" y="915352"/>
-              <a:ext cx="3343685" cy="213360"/>
+              <a:ext cx="1739259" cy="161583"/>
             </a:xfrm>
             <a:prstGeom prst="rect">
               <a:avLst/>
@@ -27385,6 +27385,39 @@
             <a:lstStyle/>
             <a:p>
               <a:pPr algn="l"/>
+              <a:r>
+                <a:rPr lang="en-US" altLang="zh-CN" sz="1050" b="1" dirty="0">
+                  <a:solidFill>
+                    <a:srgbClr val="64748B"/>
+                  </a:solidFill>
+                  <a:latin typeface="Segoe UI" panose="020B0502040204020203"/>
+                  <a:ea typeface="微软雅黑" panose="020B0503020204020204" charset="-122"/>
+                  <a:cs typeface="Segoe UI" panose="020B0502040204020203"/>
+                </a:rPr>
+                <a:t>FUTURE</a:t>
+              </a:r>
+              <a:r>
+                <a:rPr lang="zh-CN" altLang="en-US" sz="1050" b="1" dirty="0">
+                  <a:solidFill>
+                    <a:srgbClr val="64748B"/>
+                  </a:solidFill>
+                  <a:latin typeface="Segoe UI" panose="020B0502040204020203"/>
+                  <a:ea typeface="微软雅黑" panose="020B0503020204020204" charset="-122"/>
+                  <a:cs typeface="Segoe UI" panose="020B0502040204020203"/>
+                </a:rPr>
+                <a:t> </a:t>
+              </a:r>
+              <a:r>
+                <a:rPr lang="en-US" altLang="zh-CN" sz="1050" b="1" dirty="0">
+                  <a:solidFill>
+                    <a:srgbClr val="64748B"/>
+                  </a:solidFill>
+                  <a:latin typeface="Segoe UI" panose="020B0502040204020203"/>
+                  <a:ea typeface="微软雅黑" panose="020B0503020204020204" charset="-122"/>
+                  <a:cs typeface="Segoe UI" panose="020B0502040204020203"/>
+                </a:rPr>
+                <a:t>WORK</a:t>
+              </a:r>
               <a:r>
                 <a:rPr lang="zh-CN" sz="1050" b="1" dirty="0">
                   <a:solidFill>
@@ -27394,7 +27427,7 @@
                   <a:ea typeface="微软雅黑" panose="020B0503020204020204" charset="-122"/>
                   <a:cs typeface="Segoe UI" panose="020B0502040204020203"/>
                 </a:rPr>
-                <a:t>BOUNDARIES · 如实说明当前局限与可演进方向</a:t>
+                <a:t> · 可演进方向</a:t>
               </a:r>
             </a:p>
           </p:txBody>
@@ -27500,27 +27533,27 @@
       </p:sp>
       <p:grpSp>
         <p:nvGrpSpPr>
-          <p:cNvPr id="35" name="Group 35"/>
+          <p:cNvPr id="59" name="Group 59"/>
           <p:cNvGrpSpPr/>
           <p:nvPr/>
         </p:nvGrpSpPr>
         <p:grpSpPr>
           <a:xfrm>
-            <a:off x="609600" y="1504950"/>
-            <a:ext cx="5334000" cy="4648200"/>
-            <a:chOff x="609600" y="1504950"/>
+            <a:off x="666750" y="1504950"/>
+            <a:ext cx="10915650" cy="4648200"/>
+            <a:chOff x="6248400" y="1504950"/>
             <a:chExt cx="5334000" cy="4648200"/>
           </a:xfrm>
         </p:grpSpPr>
         <p:sp>
           <p:nvSpPr>
-            <p:cNvPr id="9" name="Rectangle 9"/>
+            <p:cNvPr id="36" name="Rectangle 36"/>
             <p:cNvSpPr/>
             <p:nvPr/>
           </p:nvSpPr>
           <p:spPr>
             <a:xfrm>
-              <a:off x="609600" y="1504950"/>
+              <a:off x="6248400" y="1504950"/>
               <a:ext cx="5334000" cy="4648200"/>
             </a:xfrm>
             <a:prstGeom prst="roundRect">
@@ -27547,1142 +27580,6 @@
         </p:sp>
         <p:sp>
           <p:nvSpPr>
-            <p:cNvPr id="10" name="Rectangle 10"/>
-            <p:cNvSpPr/>
-            <p:nvPr/>
-          </p:nvSpPr>
-          <p:spPr>
-            <a:xfrm>
-              <a:off x="609600" y="1504950"/>
-              <a:ext cx="5334000" cy="609600"/>
-            </a:xfrm>
-            <a:prstGeom prst="roundRect">
-              <a:avLst>
-                <a:gd name="adj" fmla="val 21875"/>
-              </a:avLst>
-            </a:prstGeom>
-            <a:solidFill>
-              <a:srgbClr val="FFFBEB"/>
-            </a:solidFill>
-            <a:ln>
-              <a:noFill/>
-            </a:ln>
-          </p:spPr>
-        </p:sp>
-        <p:sp>
-          <p:nvSpPr>
-            <p:cNvPr id="11" name="Rectangle 11"/>
-            <p:cNvSpPr/>
-            <p:nvPr/>
-          </p:nvSpPr>
-          <p:spPr>
-            <a:xfrm>
-              <a:off x="609600" y="1905000"/>
-              <a:ext cx="5334000" cy="209550"/>
-            </a:xfrm>
-            <a:prstGeom prst="rect">
-              <a:avLst/>
-            </a:prstGeom>
-            <a:solidFill>
-              <a:srgbClr val="FFFBEB"/>
-            </a:solidFill>
-            <a:ln>
-              <a:noFill/>
-            </a:ln>
-          </p:spPr>
-        </p:sp>
-        <p:sp>
-          <p:nvSpPr>
-            <p:cNvPr id="12" name="Freeform 12"/>
-            <p:cNvSpPr/>
-            <p:nvPr/>
-          </p:nvSpPr>
-          <p:spPr>
-            <a:xfrm>
-              <a:off x="876300" y="1657350"/>
-              <a:ext cx="304800" cy="285750"/>
-            </a:xfrm>
-            <a:custGeom>
-              <a:avLst/>
-              <a:gdLst/>
-              <a:ahLst/>
-              <a:cxnLst/>
-              <a:rect l="l" t="t" r="r" b="b"/>
-              <a:pathLst>
-                <a:path w="304800" h="285750">
-                  <a:moveTo>
-                    <a:pt x="304800" y="285750"/>
-                  </a:moveTo>
-                  <a:lnTo>
-                    <a:pt x="0" y="285750"/>
-                  </a:lnTo>
-                  <a:lnTo>
-                    <a:pt x="0" y="228600"/>
-                  </a:lnTo>
-                  <a:lnTo>
-                    <a:pt x="133350" y="0"/>
-                  </a:lnTo>
-                  <a:lnTo>
-                    <a:pt x="171450" y="0"/>
-                  </a:lnTo>
-                  <a:lnTo>
-                    <a:pt x="304800" y="228600"/>
-                  </a:lnTo>
-                  <a:lnTo>
-                    <a:pt x="304800" y="285750"/>
-                  </a:lnTo>
-                  <a:close/>
-                  <a:moveTo>
-                    <a:pt x="133350" y="76200"/>
-                  </a:moveTo>
-                  <a:lnTo>
-                    <a:pt x="171450" y="76200"/>
-                  </a:lnTo>
-                  <a:lnTo>
-                    <a:pt x="171450" y="171450"/>
-                  </a:lnTo>
-                  <a:lnTo>
-                    <a:pt x="133350" y="171450"/>
-                  </a:lnTo>
-                  <a:lnTo>
-                    <a:pt x="133350" y="76200"/>
-                  </a:lnTo>
-                  <a:close/>
-                  <a:moveTo>
-                    <a:pt x="133350" y="209550"/>
-                  </a:moveTo>
-                  <a:lnTo>
-                    <a:pt x="171450" y="209550"/>
-                  </a:lnTo>
-                  <a:lnTo>
-                    <a:pt x="171450" y="247650"/>
-                  </a:lnTo>
-                  <a:lnTo>
-                    <a:pt x="133350" y="247650"/>
-                  </a:lnTo>
-                  <a:lnTo>
-                    <a:pt x="133350" y="209550"/>
-                  </a:lnTo>
-                  <a:close/>
-                </a:path>
-              </a:pathLst>
-            </a:custGeom>
-            <a:solidFill>
-              <a:srgbClr val="D97706"/>
-            </a:solidFill>
-            <a:ln>
-              <a:noFill/>
-            </a:ln>
-          </p:spPr>
-        </p:sp>
-        <p:sp>
-          <p:nvSpPr>
-            <p:cNvPr id="13" name="TextBox 13"/>
-            <p:cNvSpPr txBox="1"/>
-            <p:nvPr/>
-          </p:nvSpPr>
-          <p:spPr>
-            <a:xfrm>
-              <a:off x="1276350" y="1743075"/>
-              <a:ext cx="958215" cy="304800"/>
-            </a:xfrm>
-            <a:prstGeom prst="rect">
-              <a:avLst/>
-            </a:prstGeom>
-            <a:noFill/>
-            <a:ln>
-              <a:noFill/>
-            </a:ln>
-          </p:spPr>
-          <p:txBody>
-            <a:bodyPr wrap="none" lIns="0" tIns="0" rIns="0" bIns="0" anchor="t" anchorCtr="0">
-              <a:spAutoFit/>
-            </a:bodyPr>
-            <a:lstStyle/>
-            <a:p>
-              <a:pPr algn="l"/>
-              <a:r>
-                <a:rPr lang="zh-CN" sz="1500" b="1" dirty="0">
-                  <a:solidFill>
-                    <a:srgbClr val="B45309"/>
-                  </a:solidFill>
-                  <a:latin typeface="Segoe UI" panose="020B0502040204020203"/>
-                  <a:ea typeface="微软雅黑" panose="020B0503020204020204" charset="-122"/>
-                  <a:cs typeface="Segoe UI" panose="020B0502040204020203"/>
-                </a:rPr>
-                <a:t>当前边界</a:t>
-              </a:r>
-            </a:p>
-          </p:txBody>
-        </p:sp>
-        <p:sp>
-          <p:nvSpPr>
-            <p:cNvPr id="14" name="Rectangle 14"/>
-            <p:cNvSpPr/>
-            <p:nvPr/>
-          </p:nvSpPr>
-          <p:spPr>
-            <a:xfrm>
-              <a:off x="876300" y="2381250"/>
-              <a:ext cx="381000" cy="381000"/>
-            </a:xfrm>
-            <a:prstGeom prst="roundRect">
-              <a:avLst>
-                <a:gd name="adj" fmla="val 25000"/>
-              </a:avLst>
-            </a:prstGeom>
-            <a:solidFill>
-              <a:srgbClr val="FFFBEB"/>
-            </a:solidFill>
-            <a:ln>
-              <a:noFill/>
-            </a:ln>
-          </p:spPr>
-        </p:sp>
-        <p:grpSp>
-          <p:nvGrpSpPr>
-            <p:cNvPr id="18" name="Group 18"/>
-            <p:cNvGrpSpPr/>
-            <p:nvPr/>
-          </p:nvGrpSpPr>
-          <p:grpSpPr>
-            <a:xfrm>
-              <a:off x="981075" y="2457450"/>
-              <a:ext cx="171450" cy="228600"/>
-              <a:chOff x="981075" y="2457450"/>
-              <a:chExt cx="171450" cy="228600"/>
-            </a:xfrm>
-          </p:grpSpPr>
-          <p:sp>
-            <p:nvSpPr>
-              <p:cNvPr id="15" name="Freeform 15"/>
-              <p:cNvSpPr/>
-              <p:nvPr/>
-            </p:nvSpPr>
-            <p:spPr>
-              <a:xfrm>
-                <a:off x="981075" y="2548890"/>
-                <a:ext cx="171450" cy="65722"/>
-              </a:xfrm>
-              <a:custGeom>
-                <a:avLst/>
-                <a:gdLst/>
-                <a:ahLst/>
-                <a:cxnLst/>
-                <a:rect l="l" t="t" r="r" b="b"/>
-                <a:pathLst>
-                  <a:path w="171450" h="65722">
-                    <a:moveTo>
-                      <a:pt x="159121" y="7289"/>
-                    </a:moveTo>
-                    <a:cubicBezTo>
-                      <a:pt x="163140" y="5279"/>
-                      <a:pt x="167339" y="2855"/>
-                      <a:pt x="171450" y="0"/>
-                    </a:cubicBezTo>
-                    <a:lnTo>
-                      <a:pt x="171450" y="22860"/>
-                    </a:lnTo>
-                    <a:cubicBezTo>
-                      <a:pt x="171450" y="46532"/>
-                      <a:pt x="133069" y="65722"/>
-                      <a:pt x="85725" y="65722"/>
-                    </a:cubicBezTo>
-                    <a:cubicBezTo>
-                      <a:pt x="38380" y="65722"/>
-                      <a:pt x="0" y="46532"/>
-                      <a:pt x="0" y="22860"/>
-                    </a:cubicBezTo>
-                    <a:lnTo>
-                      <a:pt x="0" y="0"/>
-                    </a:lnTo>
-                    <a:cubicBezTo>
-                      <a:pt x="4111" y="2855"/>
-                      <a:pt x="8309" y="5279"/>
-                      <a:pt x="12329" y="7289"/>
-                    </a:cubicBezTo>
-                    <a:cubicBezTo>
-                      <a:pt x="32589" y="17419"/>
-                      <a:pt x="58578" y="22860"/>
-                      <a:pt x="85725" y="22860"/>
-                    </a:cubicBezTo>
-                    <a:cubicBezTo>
-                      <a:pt x="112872" y="22860"/>
-                      <a:pt x="138860" y="17419"/>
-                      <a:pt x="159121" y="7289"/>
-                    </a:cubicBezTo>
-                    <a:close/>
-                  </a:path>
-                </a:pathLst>
-              </a:custGeom>
-              <a:solidFill>
-                <a:srgbClr val="D97706"/>
-              </a:solidFill>
-              <a:ln>
-                <a:noFill/>
-              </a:ln>
-            </p:spPr>
-          </p:sp>
-          <p:sp>
-            <p:nvSpPr>
-              <p:cNvPr id="16" name="Freeform 16"/>
-              <p:cNvSpPr/>
-              <p:nvPr/>
-            </p:nvSpPr>
-            <p:spPr>
-              <a:xfrm>
-                <a:off x="981075" y="2620328"/>
-                <a:ext cx="171450" cy="65722"/>
-              </a:xfrm>
-              <a:custGeom>
-                <a:avLst/>
-                <a:gdLst/>
-                <a:ahLst/>
-                <a:cxnLst/>
-                <a:rect l="l" t="t" r="r" b="b"/>
-                <a:pathLst>
-                  <a:path w="171450" h="65722">
-                    <a:moveTo>
-                      <a:pt x="0" y="0"/>
-                    </a:moveTo>
-                    <a:lnTo>
-                      <a:pt x="0" y="22860"/>
-                    </a:lnTo>
-                    <a:cubicBezTo>
-                      <a:pt x="0" y="46533"/>
-                      <a:pt x="38380" y="65722"/>
-                      <a:pt x="85725" y="65722"/>
-                    </a:cubicBezTo>
-                    <a:cubicBezTo>
-                      <a:pt x="133069" y="65722"/>
-                      <a:pt x="171450" y="46533"/>
-                      <a:pt x="171450" y="22860"/>
-                    </a:cubicBezTo>
-                    <a:lnTo>
-                      <a:pt x="171450" y="0"/>
-                    </a:lnTo>
-                    <a:cubicBezTo>
-                      <a:pt x="167339" y="2855"/>
-                      <a:pt x="163140" y="5279"/>
-                      <a:pt x="159121" y="7289"/>
-                    </a:cubicBezTo>
-                    <a:cubicBezTo>
-                      <a:pt x="138860" y="17419"/>
-                      <a:pt x="112872" y="22860"/>
-                      <a:pt x="85725" y="22860"/>
-                    </a:cubicBezTo>
-                    <a:cubicBezTo>
-                      <a:pt x="58578" y="22860"/>
-                      <a:pt x="32589" y="17419"/>
-                      <a:pt x="12329" y="7289"/>
-                    </a:cubicBezTo>
-                    <a:cubicBezTo>
-                      <a:pt x="8309" y="5279"/>
-                      <a:pt x="4111" y="2855"/>
-                      <a:pt x="0" y="0"/>
-                    </a:cubicBezTo>
-                    <a:close/>
-                  </a:path>
-                </a:pathLst>
-              </a:custGeom>
-              <a:solidFill>
-                <a:srgbClr val="D97706"/>
-              </a:solidFill>
-              <a:ln>
-                <a:noFill/>
-              </a:ln>
-            </p:spPr>
-          </p:sp>
-          <p:sp>
-            <p:nvSpPr>
-              <p:cNvPr id="17" name="Freeform 17"/>
-              <p:cNvSpPr/>
-              <p:nvPr/>
-            </p:nvSpPr>
-            <p:spPr>
-              <a:xfrm>
-                <a:off x="981075" y="2457450"/>
-                <a:ext cx="171450" cy="85725"/>
-              </a:xfrm>
-              <a:custGeom>
-                <a:avLst/>
-                <a:gdLst/>
-                <a:ahLst/>
-                <a:cxnLst/>
-                <a:rect l="l" t="t" r="r" b="b"/>
-                <a:pathLst>
-                  <a:path w="171450" h="85725">
-                    <a:moveTo>
-                      <a:pt x="85725" y="0"/>
-                    </a:moveTo>
-                    <a:cubicBezTo>
-                      <a:pt x="133069" y="0"/>
-                      <a:pt x="171450" y="19190"/>
-                      <a:pt x="171450" y="42862"/>
-                    </a:cubicBezTo>
-                    <a:cubicBezTo>
-                      <a:pt x="171450" y="66535"/>
-                      <a:pt x="133069" y="85725"/>
-                      <a:pt x="85725" y="85725"/>
-                    </a:cubicBezTo>
-                    <a:cubicBezTo>
-                      <a:pt x="38380" y="85725"/>
-                      <a:pt x="0" y="66535"/>
-                      <a:pt x="0" y="42862"/>
-                    </a:cubicBezTo>
-                    <a:cubicBezTo>
-                      <a:pt x="0" y="19190"/>
-                      <a:pt x="38380" y="0"/>
-                      <a:pt x="85725" y="0"/>
-                    </a:cubicBezTo>
-                    <a:close/>
-                  </a:path>
-                </a:pathLst>
-              </a:custGeom>
-              <a:solidFill>
-                <a:srgbClr val="D97706"/>
-              </a:solidFill>
-              <a:ln>
-                <a:noFill/>
-              </a:ln>
-            </p:spPr>
-          </p:sp>
-        </p:grpSp>
-        <p:sp>
-          <p:nvSpPr>
-            <p:cNvPr id="19" name="TextBox 19"/>
-            <p:cNvSpPr txBox="1"/>
-            <p:nvPr/>
-          </p:nvSpPr>
-          <p:spPr>
-            <a:xfrm>
-              <a:off x="1393508" y="2415064"/>
-              <a:ext cx="1662315" cy="196208"/>
-            </a:xfrm>
-            <a:prstGeom prst="rect">
-              <a:avLst/>
-            </a:prstGeom>
-            <a:noFill/>
-            <a:ln>
-              <a:noFill/>
-            </a:ln>
-          </p:spPr>
-          <p:txBody>
-            <a:bodyPr wrap="none" lIns="0" tIns="0" rIns="0" bIns="0" anchor="t" anchorCtr="0">
-              <a:spAutoFit/>
-            </a:bodyPr>
-            <a:lstStyle/>
-            <a:p>
-              <a:pPr algn="l"/>
-              <a:r>
-                <a:rPr lang="zh-CN" sz="1275" b="1" dirty="0">
-                  <a:solidFill>
-                    <a:srgbClr val="1E293B"/>
-                  </a:solidFill>
-                  <a:latin typeface="Segoe UI" panose="020B0502040204020203"/>
-                  <a:ea typeface="微软雅黑" panose="020B0503020204020204" charset="-122"/>
-                  <a:cs typeface="Segoe UI" panose="020B0502040204020203"/>
-                </a:rPr>
-                <a:t>本地知识库为</a:t>
-              </a:r>
-              <a:r>
-                <a:rPr lang="zh-CN" altLang="en-US" sz="1275" b="1" dirty="0">
-                  <a:solidFill>
-                    <a:srgbClr val="1E293B"/>
-                  </a:solidFill>
-                  <a:latin typeface="Segoe UI" panose="020B0502040204020203"/>
-                  <a:ea typeface="微软雅黑" panose="020B0503020204020204" charset="-122"/>
-                  <a:cs typeface="Segoe UI" panose="020B0502040204020203"/>
-                </a:rPr>
-                <a:t>示例</a:t>
-              </a:r>
-              <a:r>
-                <a:rPr lang="zh-CN" sz="1275" b="1" dirty="0">
-                  <a:solidFill>
-                    <a:srgbClr val="1E293B"/>
-                  </a:solidFill>
-                  <a:latin typeface="Segoe UI" panose="020B0502040204020203"/>
-                  <a:ea typeface="微软雅黑" panose="020B0503020204020204" charset="-122"/>
-                  <a:cs typeface="Segoe UI" panose="020B0502040204020203"/>
-                </a:rPr>
-                <a:t>数据</a:t>
-              </a:r>
-            </a:p>
-          </p:txBody>
-        </p:sp>
-        <p:sp>
-          <p:nvSpPr>
-            <p:cNvPr id="20" name="TextBox 20"/>
-            <p:cNvSpPr txBox="1"/>
-            <p:nvPr/>
-          </p:nvSpPr>
-          <p:spPr>
-            <a:xfrm>
-              <a:off x="1396365" y="2648902"/>
-              <a:ext cx="4382135" cy="323165"/>
-            </a:xfrm>
-            <a:prstGeom prst="rect">
-              <a:avLst/>
-            </a:prstGeom>
-            <a:noFill/>
-            <a:ln>
-              <a:noFill/>
-            </a:ln>
-          </p:spPr>
-          <p:txBody>
-            <a:bodyPr wrap="square" lIns="0" tIns="0" rIns="0" bIns="0" anchor="t" anchorCtr="0">
-              <a:spAutoFit/>
-            </a:bodyPr>
-            <a:lstStyle/>
-            <a:p>
-              <a:pPr algn="l"/>
-              <a:r>
-                <a:rPr lang="zh-CN" altLang="en-US" sz="1050" dirty="0">
-                  <a:solidFill>
-                    <a:srgbClr val="64748B"/>
-                  </a:solidFill>
-                  <a:latin typeface="Segoe UI" panose="020B0502040204020203"/>
-                  <a:ea typeface="微软雅黑" panose="020B0503020204020204" charset="-122"/>
-                  <a:cs typeface="Segoe UI" panose="020B0502040204020203"/>
-                </a:rPr>
-                <a:t>本地知识库仅作为离线兜底，实时信息主要依赖联网检索摘要，仍需出行前官方复核</a:t>
-              </a:r>
-              <a:endParaRPr lang="zh-CN" sz="1050" dirty="0">
-                <a:solidFill>
-                  <a:srgbClr val="64748B"/>
-                </a:solidFill>
-                <a:latin typeface="Segoe UI" panose="020B0502040204020203"/>
-                <a:ea typeface="微软雅黑" panose="020B0503020204020204" charset="-122"/>
-                <a:cs typeface="Segoe UI" panose="020B0502040204020203"/>
-              </a:endParaRPr>
-            </a:p>
-          </p:txBody>
-        </p:sp>
-        <p:sp>
-          <p:nvSpPr>
-            <p:cNvPr id="21" name="Rectangle 21"/>
-            <p:cNvSpPr/>
-            <p:nvPr/>
-          </p:nvSpPr>
-          <p:spPr>
-            <a:xfrm>
-              <a:off x="876300" y="3390900"/>
-              <a:ext cx="381000" cy="381000"/>
-            </a:xfrm>
-            <a:prstGeom prst="roundRect">
-              <a:avLst>
-                <a:gd name="adj" fmla="val 25000"/>
-              </a:avLst>
-            </a:prstGeom>
-            <a:solidFill>
-              <a:srgbClr val="FFFBEB"/>
-            </a:solidFill>
-            <a:ln>
-              <a:noFill/>
-            </a:ln>
-          </p:spPr>
-        </p:sp>
-        <p:grpSp>
-          <p:nvGrpSpPr>
-            <p:cNvPr id="25" name="Group 25"/>
-            <p:cNvGrpSpPr/>
-            <p:nvPr/>
-          </p:nvGrpSpPr>
-          <p:grpSpPr>
-            <a:xfrm>
-              <a:off x="966788" y="3467100"/>
-              <a:ext cx="200025" cy="228600"/>
-              <a:chOff x="966788" y="3467100"/>
-              <a:chExt cx="200025" cy="228600"/>
-            </a:xfrm>
-          </p:grpSpPr>
-          <p:sp>
-            <p:nvSpPr>
-              <p:cNvPr id="22" name="Freeform 22"/>
-              <p:cNvSpPr/>
-              <p:nvPr/>
-            </p:nvSpPr>
-            <p:spPr>
-              <a:xfrm>
-                <a:off x="966788" y="3467100"/>
-                <a:ext cx="200025" cy="114300"/>
-              </a:xfrm>
-              <a:custGeom>
-                <a:avLst/>
-                <a:gdLst/>
-                <a:ahLst/>
-                <a:cxnLst/>
-                <a:rect l="l" t="t" r="r" b="b"/>
-                <a:pathLst>
-                  <a:path w="200025" h="114300">
-                    <a:moveTo>
-                      <a:pt x="0" y="71438"/>
-                    </a:moveTo>
-                    <a:lnTo>
-                      <a:pt x="0" y="42862"/>
-                    </a:lnTo>
-                    <a:lnTo>
-                      <a:pt x="100012" y="0"/>
-                    </a:lnTo>
-                    <a:lnTo>
-                      <a:pt x="200025" y="42862"/>
-                    </a:lnTo>
-                    <a:lnTo>
-                      <a:pt x="200025" y="71438"/>
-                    </a:lnTo>
-                    <a:lnTo>
-                      <a:pt x="100012" y="114300"/>
-                    </a:lnTo>
-                    <a:lnTo>
-                      <a:pt x="0" y="71438"/>
-                    </a:lnTo>
-                    <a:close/>
-                  </a:path>
-                </a:pathLst>
-              </a:custGeom>
-              <a:solidFill>
-                <a:srgbClr val="D97706"/>
-              </a:solidFill>
-              <a:ln>
-                <a:noFill/>
-              </a:ln>
-            </p:spPr>
-          </p:sp>
-          <p:sp>
-            <p:nvSpPr>
-              <p:cNvPr id="23" name="Freeform 23"/>
-              <p:cNvSpPr/>
-              <p:nvPr/>
-            </p:nvSpPr>
-            <p:spPr>
-              <a:xfrm>
-                <a:off x="966788" y="3624262"/>
-                <a:ext cx="200025" cy="71438"/>
-              </a:xfrm>
-              <a:custGeom>
-                <a:avLst/>
-                <a:gdLst/>
-                <a:ahLst/>
-                <a:cxnLst/>
-                <a:rect l="l" t="t" r="r" b="b"/>
-                <a:pathLst>
-                  <a:path w="200025" h="71438">
-                    <a:moveTo>
-                      <a:pt x="100012" y="71438"/>
-                    </a:moveTo>
-                    <a:lnTo>
-                      <a:pt x="0" y="28575"/>
-                    </a:lnTo>
-                    <a:lnTo>
-                      <a:pt x="0" y="0"/>
-                    </a:lnTo>
-                    <a:lnTo>
-                      <a:pt x="100012" y="42862"/>
-                    </a:lnTo>
-                    <a:lnTo>
-                      <a:pt x="200025" y="0"/>
-                    </a:lnTo>
-                    <a:lnTo>
-                      <a:pt x="200025" y="28575"/>
-                    </a:lnTo>
-                    <a:lnTo>
-                      <a:pt x="100012" y="71438"/>
-                    </a:lnTo>
-                    <a:close/>
-                  </a:path>
-                </a:pathLst>
-              </a:custGeom>
-              <a:solidFill>
-                <a:srgbClr val="D97706"/>
-              </a:solidFill>
-              <a:ln>
-                <a:noFill/>
-              </a:ln>
-            </p:spPr>
-          </p:sp>
-          <p:sp>
-            <p:nvSpPr>
-              <p:cNvPr id="24" name="Freeform 24"/>
-              <p:cNvSpPr/>
-              <p:nvPr/>
-            </p:nvSpPr>
-            <p:spPr>
-              <a:xfrm>
-                <a:off x="966788" y="3567112"/>
-                <a:ext cx="200025" cy="71438"/>
-              </a:xfrm>
-              <a:custGeom>
-                <a:avLst/>
-                <a:gdLst/>
-                <a:ahLst/>
-                <a:cxnLst/>
-                <a:rect l="l" t="t" r="r" b="b"/>
-                <a:pathLst>
-                  <a:path w="200025" h="71438">
-                    <a:moveTo>
-                      <a:pt x="0" y="28575"/>
-                    </a:moveTo>
-                    <a:lnTo>
-                      <a:pt x="100012" y="71438"/>
-                    </a:lnTo>
-                    <a:lnTo>
-                      <a:pt x="200025" y="28575"/>
-                    </a:lnTo>
-                    <a:lnTo>
-                      <a:pt x="200025" y="0"/>
-                    </a:lnTo>
-                    <a:lnTo>
-                      <a:pt x="100012" y="42862"/>
-                    </a:lnTo>
-                    <a:lnTo>
-                      <a:pt x="0" y="0"/>
-                    </a:lnTo>
-                    <a:lnTo>
-                      <a:pt x="0" y="28575"/>
-                    </a:lnTo>
-                    <a:close/>
-                  </a:path>
-                </a:pathLst>
-              </a:custGeom>
-              <a:solidFill>
-                <a:srgbClr val="D97706"/>
-              </a:solidFill>
-              <a:ln>
-                <a:noFill/>
-              </a:ln>
-            </p:spPr>
-          </p:sp>
-        </p:grpSp>
-        <p:sp>
-          <p:nvSpPr>
-            <p:cNvPr id="26" name="TextBox 26"/>
-            <p:cNvSpPr txBox="1"/>
-            <p:nvPr/>
-          </p:nvSpPr>
-          <p:spPr>
-            <a:xfrm>
-              <a:off x="1393508" y="3424714"/>
-              <a:ext cx="2173378" cy="259080"/>
-            </a:xfrm>
-            <a:prstGeom prst="rect">
-              <a:avLst/>
-            </a:prstGeom>
-            <a:noFill/>
-            <a:ln>
-              <a:noFill/>
-            </a:ln>
-          </p:spPr>
-          <p:txBody>
-            <a:bodyPr wrap="none" lIns="0" tIns="0" rIns="0" bIns="0" anchor="t" anchorCtr="0">
-              <a:spAutoFit/>
-            </a:bodyPr>
-            <a:lstStyle/>
-            <a:p>
-              <a:pPr algn="l"/>
-              <a:r>
-                <a:rPr lang="zh-CN" sz="1275" b="1" dirty="0">
-                  <a:solidFill>
-                    <a:srgbClr val="1E293B"/>
-                  </a:solidFill>
-                  <a:latin typeface="Segoe UI" panose="020B0502040204020203"/>
-                  <a:ea typeface="微软雅黑" panose="020B0503020204020204" charset="-122"/>
-                  <a:cs typeface="Segoe UI" panose="020B0502040204020203"/>
-                </a:rPr>
-                <a:t>未实现完整向量检索 RAG</a:t>
-              </a:r>
-            </a:p>
-          </p:txBody>
-        </p:sp>
-        <p:sp>
-          <p:nvSpPr>
-            <p:cNvPr id="27" name="TextBox 27"/>
-            <p:cNvSpPr txBox="1"/>
-            <p:nvPr/>
-          </p:nvSpPr>
-          <p:spPr>
-            <a:xfrm>
-              <a:off x="1396365" y="3658552"/>
-              <a:ext cx="3541034" cy="161583"/>
-            </a:xfrm>
-            <a:prstGeom prst="rect">
-              <a:avLst/>
-            </a:prstGeom>
-            <a:noFill/>
-            <a:ln>
-              <a:noFill/>
-            </a:ln>
-          </p:spPr>
-          <p:txBody>
-            <a:bodyPr wrap="none" lIns="0" tIns="0" rIns="0" bIns="0" anchor="t" anchorCtr="0">
-              <a:spAutoFit/>
-            </a:bodyPr>
-            <a:lstStyle/>
-            <a:p>
-              <a:pPr algn="l"/>
-              <a:r>
-                <a:rPr lang="zh-CN" altLang="en-US" sz="1050" dirty="0">
-                  <a:solidFill>
-                    <a:srgbClr val="64748B"/>
-                  </a:solidFill>
-                  <a:latin typeface="Segoe UI" panose="020B0502040204020203"/>
-                  <a:ea typeface="微软雅黑" panose="020B0503020204020204" charset="-122"/>
-                  <a:cs typeface="Segoe UI" panose="020B0502040204020203"/>
-                </a:rPr>
-                <a:t>由于旅游资料多为网页，</a:t>
-              </a:r>
-              <a:r>
-                <a:rPr lang="en-US" altLang="zh-CN" sz="1050" dirty="0">
-                  <a:solidFill>
-                    <a:srgbClr val="64748B"/>
-                  </a:solidFill>
-                  <a:latin typeface="Segoe UI" panose="020B0502040204020203"/>
-                  <a:ea typeface="微软雅黑" panose="020B0503020204020204" charset="-122"/>
-                  <a:cs typeface="Segoe UI" panose="020B0502040204020203"/>
-                </a:rPr>
-                <a:t>MCP + </a:t>
-              </a:r>
-              <a:r>
-                <a:rPr lang="zh-CN" altLang="en-US" sz="1050" dirty="0">
-                  <a:solidFill>
-                    <a:srgbClr val="64748B"/>
-                  </a:solidFill>
-                  <a:latin typeface="Segoe UI" panose="020B0502040204020203"/>
-                  <a:ea typeface="微软雅黑" panose="020B0503020204020204" charset="-122"/>
-                  <a:cs typeface="Segoe UI" panose="020B0502040204020203"/>
-                </a:rPr>
-                <a:t>联网检索作为更契合项目</a:t>
-              </a:r>
-              <a:endParaRPr lang="zh-CN" sz="1050" dirty="0">
-                <a:solidFill>
-                  <a:srgbClr val="64748B"/>
-                </a:solidFill>
-                <a:latin typeface="Segoe UI" panose="020B0502040204020203"/>
-                <a:ea typeface="微软雅黑" panose="020B0503020204020204" charset="-122"/>
-                <a:cs typeface="Segoe UI" panose="020B0502040204020203"/>
-              </a:endParaRPr>
-            </a:p>
-          </p:txBody>
-        </p:sp>
-        <p:sp>
-          <p:nvSpPr>
-            <p:cNvPr id="28" name="Rectangle 28"/>
-            <p:cNvSpPr/>
-            <p:nvPr/>
-          </p:nvSpPr>
-          <p:spPr>
-            <a:xfrm>
-              <a:off x="876300" y="4400550"/>
-              <a:ext cx="381000" cy="381000"/>
-            </a:xfrm>
-            <a:prstGeom prst="roundRect">
-              <a:avLst>
-                <a:gd name="adj" fmla="val 25000"/>
-              </a:avLst>
-            </a:prstGeom>
-            <a:solidFill>
-              <a:srgbClr val="FFFBEB"/>
-            </a:solidFill>
-            <a:ln>
-              <a:noFill/>
-            </a:ln>
-          </p:spPr>
-        </p:sp>
-        <p:sp>
-          <p:nvSpPr>
-            <p:cNvPr id="29" name="Freeform 29"/>
-            <p:cNvSpPr/>
-            <p:nvPr/>
-          </p:nvSpPr>
-          <p:spPr>
-            <a:xfrm>
-              <a:off x="966788" y="4476750"/>
-              <a:ext cx="200025" cy="228600"/>
-            </a:xfrm>
-            <a:custGeom>
-              <a:avLst/>
-              <a:gdLst/>
-              <a:ahLst/>
-              <a:cxnLst/>
-              <a:rect l="l" t="t" r="r" b="b"/>
-              <a:pathLst>
-                <a:path w="200025" h="228600">
-                  <a:moveTo>
-                    <a:pt x="47864" y="191351"/>
-                  </a:moveTo>
-                  <a:lnTo>
-                    <a:pt x="100012" y="228600"/>
-                  </a:lnTo>
-                  <a:lnTo>
-                    <a:pt x="152160" y="191351"/>
-                  </a:lnTo>
-                  <a:cubicBezTo>
-                    <a:pt x="182198" y="169896"/>
-                    <a:pt x="200025" y="135255"/>
-                    <a:pt x="200025" y="98342"/>
-                  </a:cubicBezTo>
-                  <a:lnTo>
-                    <a:pt x="200025" y="42862"/>
-                  </a:lnTo>
-                  <a:lnTo>
-                    <a:pt x="100012" y="0"/>
-                  </a:lnTo>
-                  <a:lnTo>
-                    <a:pt x="0" y="42862"/>
-                  </a:lnTo>
-                  <a:lnTo>
-                    <a:pt x="0" y="98342"/>
-                  </a:lnTo>
-                  <a:cubicBezTo>
-                    <a:pt x="0" y="135255"/>
-                    <a:pt x="17827" y="169896"/>
-                    <a:pt x="47864" y="191351"/>
-                  </a:cubicBezTo>
-                  <a:close/>
-                </a:path>
-              </a:pathLst>
-            </a:custGeom>
-            <a:solidFill>
-              <a:srgbClr val="D97706"/>
-            </a:solidFill>
-            <a:ln>
-              <a:noFill/>
-            </a:ln>
-          </p:spPr>
-        </p:sp>
-        <p:sp>
-          <p:nvSpPr>
-            <p:cNvPr id="30" name="TextBox 30"/>
-            <p:cNvSpPr txBox="1"/>
-            <p:nvPr/>
-          </p:nvSpPr>
-          <p:spPr>
-            <a:xfrm>
-              <a:off x="1393508" y="4358164"/>
-              <a:ext cx="1401056" cy="259080"/>
-            </a:xfrm>
-            <a:prstGeom prst="rect">
-              <a:avLst/>
-            </a:prstGeom>
-            <a:noFill/>
-            <a:ln>
-              <a:noFill/>
-            </a:ln>
-          </p:spPr>
-          <p:txBody>
-            <a:bodyPr wrap="none" lIns="0" tIns="0" rIns="0" bIns="0" anchor="t" anchorCtr="0">
-              <a:spAutoFit/>
-            </a:bodyPr>
-            <a:lstStyle/>
-            <a:p>
-              <a:pPr algn="l"/>
-              <a:r>
-                <a:rPr lang="zh-CN" sz="1275" b="1" dirty="0">
-                  <a:solidFill>
-                    <a:srgbClr val="1E293B"/>
-                  </a:solidFill>
-                  <a:latin typeface="Segoe UI" panose="020B0502040204020203"/>
-                  <a:ea typeface="微软雅黑" panose="020B0503020204020204" charset="-122"/>
-                  <a:cs typeface="Segoe UI" panose="020B0502040204020203"/>
-                </a:rPr>
-                <a:t>单机 JSON 存储</a:t>
-              </a:r>
-            </a:p>
-          </p:txBody>
-        </p:sp>
-        <p:sp>
-          <p:nvSpPr>
-            <p:cNvPr id="31" name="TextBox 31"/>
-            <p:cNvSpPr txBox="1"/>
-            <p:nvPr/>
-          </p:nvSpPr>
-          <p:spPr>
-            <a:xfrm>
-              <a:off x="1396365" y="4592002"/>
-              <a:ext cx="2787015" cy="213360"/>
-            </a:xfrm>
-            <a:prstGeom prst="rect">
-              <a:avLst/>
-            </a:prstGeom>
-            <a:noFill/>
-            <a:ln>
-              <a:noFill/>
-            </a:ln>
-          </p:spPr>
-          <p:txBody>
-            <a:bodyPr wrap="none" lIns="0" tIns="0" rIns="0" bIns="0" anchor="t" anchorCtr="0">
-              <a:spAutoFit/>
-            </a:bodyPr>
-            <a:lstStyle/>
-            <a:p>
-              <a:pPr algn="l"/>
-              <a:r>
-                <a:rPr lang="zh-CN" sz="1050" dirty="0">
-                  <a:solidFill>
-                    <a:srgbClr val="64748B"/>
-                  </a:solidFill>
-                  <a:latin typeface="Segoe UI" panose="020B0502040204020203"/>
-                  <a:ea typeface="微软雅黑" panose="020B0503020204020204" charset="-122"/>
-                  <a:cs typeface="Segoe UI" panose="020B0502040204020203"/>
-                </a:rPr>
-                <a:t>无认证与多用户隔离，面向单机演示场景</a:t>
-              </a:r>
-            </a:p>
-          </p:txBody>
-        </p:sp>
-        <p:sp>
-          <p:nvSpPr>
-            <p:cNvPr id="32" name="Rectangle 32"/>
-            <p:cNvSpPr/>
-            <p:nvPr/>
-          </p:nvSpPr>
-          <p:spPr>
-            <a:xfrm>
-              <a:off x="876300" y="5334000"/>
-              <a:ext cx="4800600" cy="571500"/>
-            </a:xfrm>
-            <a:prstGeom prst="roundRect">
-              <a:avLst>
-                <a:gd name="adj" fmla="val 16667"/>
-              </a:avLst>
-            </a:prstGeom>
-            <a:solidFill>
-              <a:srgbClr val="FFFBEB"/>
-            </a:solidFill>
-            <a:ln>
-              <a:noFill/>
-            </a:ln>
-          </p:spPr>
-        </p:sp>
-        <p:sp>
-          <p:nvSpPr>
-            <p:cNvPr id="33" name="TextBox 33"/>
-            <p:cNvSpPr txBox="1"/>
-            <p:nvPr/>
-          </p:nvSpPr>
-          <p:spPr>
-            <a:xfrm>
-              <a:off x="1091565" y="5458778"/>
-              <a:ext cx="670750" cy="213360"/>
-            </a:xfrm>
-            <a:prstGeom prst="rect">
-              <a:avLst/>
-            </a:prstGeom>
-            <a:noFill/>
-            <a:ln>
-              <a:noFill/>
-            </a:ln>
-          </p:spPr>
-          <p:txBody>
-            <a:bodyPr wrap="none" lIns="0" tIns="0" rIns="0" bIns="0" anchor="t" anchorCtr="0">
-              <a:spAutoFit/>
-            </a:bodyPr>
-            <a:lstStyle/>
-            <a:p>
-              <a:pPr algn="l"/>
-              <a:r>
-                <a:rPr lang="zh-CN" sz="1050" b="1" dirty="0">
-                  <a:solidFill>
-                    <a:srgbClr val="B45309"/>
-                  </a:solidFill>
-                  <a:latin typeface="Segoe UI" panose="020B0502040204020203"/>
-                  <a:ea typeface="微软雅黑" panose="020B0503020204020204" charset="-122"/>
-                  <a:cs typeface="Segoe UI" panose="020B0502040204020203"/>
-                </a:rPr>
-                <a:t>取舍说明</a:t>
-              </a:r>
-            </a:p>
-          </p:txBody>
-        </p:sp>
-        <p:sp>
-          <p:nvSpPr>
-            <p:cNvPr id="34" name="TextBox 34"/>
-            <p:cNvSpPr txBox="1"/>
-            <p:nvPr/>
-          </p:nvSpPr>
-          <p:spPr>
-            <a:xfrm>
-              <a:off x="1092518" y="5676424"/>
-              <a:ext cx="3299936" cy="198120"/>
-            </a:xfrm>
-            <a:prstGeom prst="rect">
-              <a:avLst/>
-            </a:prstGeom>
-            <a:noFill/>
-            <a:ln>
-              <a:noFill/>
-            </a:ln>
-          </p:spPr>
-          <p:txBody>
-            <a:bodyPr wrap="none" lIns="0" tIns="0" rIns="0" bIns="0" anchor="t" anchorCtr="0">
-              <a:spAutoFit/>
-            </a:bodyPr>
-            <a:lstStyle/>
-            <a:p>
-              <a:pPr algn="l"/>
-              <a:r>
-                <a:rPr lang="zh-CN" sz="975" dirty="0">
-                  <a:solidFill>
-                    <a:srgbClr val="1E293B"/>
-                  </a:solidFill>
-                  <a:latin typeface="Segoe UI" panose="020B0502040204020203"/>
-                  <a:ea typeface="微软雅黑" panose="020B0503020204020204" charset="-122"/>
-                  <a:cs typeface="Segoe UI" panose="020B0502040204020203"/>
-                </a:rPr>
-                <a:t>边界源于课程范围聚焦，均为可替换的工程化扩展点</a:t>
-              </a:r>
-            </a:p>
-          </p:txBody>
-        </p:sp>
-      </p:grpSp>
-      <p:grpSp>
-        <p:nvGrpSpPr>
-          <p:cNvPr id="59" name="Group 59"/>
-          <p:cNvGrpSpPr/>
-          <p:nvPr/>
-        </p:nvGrpSpPr>
-        <p:grpSpPr>
-          <a:xfrm>
-            <a:off x="6248400" y="1504950"/>
-            <a:ext cx="5334000" cy="4648200"/>
-            <a:chOff x="6248400" y="1504950"/>
-            <a:chExt cx="5334000" cy="4648200"/>
-          </a:xfrm>
-        </p:grpSpPr>
-        <p:sp>
-          <p:nvSpPr>
-            <p:cNvPr id="36" name="Rectangle 36"/>
-            <p:cNvSpPr/>
-            <p:nvPr/>
-          </p:nvSpPr>
-          <p:spPr>
-            <a:xfrm>
-              <a:off x="6248400" y="1504950"/>
-              <a:ext cx="5334000" cy="4648200"/>
-            </a:xfrm>
-            <a:prstGeom prst="roundRect">
-              <a:avLst>
-                <a:gd name="adj" fmla="val 2869"/>
-              </a:avLst>
-            </a:prstGeom>
-            <a:solidFill>
-              <a:srgbClr val="FFFFFF"/>
-            </a:solidFill>
-            <a:ln w="14288">
-              <a:solidFill>
-                <a:srgbClr val="E2E8F0"/>
-              </a:solidFill>
-            </a:ln>
-            <a:effectLst>
-              <a:outerShdw blurRad="114300" dist="38100" dir="5400000" algn="ctr" rotWithShape="0">
-                <a:srgbClr val="0F172A">
-                  <a:alpha val="6000"/>
-                </a:srgbClr>
-              </a:outerShdw>
-            </a:effectLst>
-          </p:spPr>
-        </p:sp>
-        <p:sp>
-          <p:nvSpPr>
             <p:cNvPr id="37" name="Rectangle 37"/>
             <p:cNvSpPr/>
             <p:nvPr/>
@@ -28704,6 +27601,13 @@
               <a:noFill/>
             </a:ln>
           </p:spPr>
+          <p:txBody>
+            <a:bodyPr/>
+            <a:lstStyle/>
+            <a:p>
+              <a:endParaRPr lang="zh-CN" altLang="en-US" dirty="0"/>
+            </a:p>
+          </p:txBody>
         </p:sp>
         <p:sp>
           <p:nvSpPr>
@@ -28736,9 +27640,9 @@
           <p:grpSpPr>
             <a:xfrm>
               <a:off x="6515100" y="1657350"/>
-              <a:ext cx="304800" cy="304800"/>
+              <a:ext cx="147770" cy="304800"/>
               <a:chOff x="6515100" y="1657350"/>
-              <a:chExt cx="304800" cy="304800"/>
+              <a:chExt cx="147770" cy="304800"/>
             </a:xfrm>
           </p:grpSpPr>
           <p:sp>
@@ -28750,7 +27654,7 @@
             <p:spPr>
               <a:xfrm>
                 <a:off x="6515100" y="1657350"/>
-                <a:ext cx="304800" cy="304800"/>
+                <a:ext cx="147770" cy="304800"/>
               </a:xfrm>
               <a:custGeom>
                 <a:avLst/>
@@ -28839,8 +27743,8 @@
             </p:nvSpPr>
             <p:spPr>
               <a:xfrm>
-                <a:off x="6591300" y="1735950"/>
-                <a:ext cx="150000" cy="150000"/>
+                <a:off x="6549034" y="1735950"/>
+                <a:ext cx="73885" cy="150000"/>
               </a:xfrm>
               <a:custGeom>
                 <a:avLst/>
@@ -28909,8 +27813,8 @@
             </p:nvSpPr>
             <p:spPr>
               <a:xfrm>
-                <a:off x="6663555" y="1657350"/>
-                <a:ext cx="156345" cy="156345"/>
+                <a:off x="6585058" y="1657350"/>
+                <a:ext cx="75644" cy="156345"/>
               </a:xfrm>
               <a:custGeom>
                 <a:avLst/>
@@ -29012,7 +27916,7 @@
           <p:spPr>
             <a:xfrm>
               <a:off x="6515100" y="2533650"/>
-              <a:ext cx="266700" cy="266700"/>
+              <a:ext cx="130178" cy="266700"/>
             </a:xfrm>
             <a:custGeom>
               <a:avLst/>
@@ -29168,7 +28072,7 @@
           <p:spPr>
             <a:xfrm>
               <a:off x="6515100" y="3454400"/>
-              <a:ext cx="266700" cy="266700"/>
+              <a:ext cx="130178" cy="266700"/>
             </a:xfrm>
             <a:custGeom>
               <a:avLst/>
@@ -29331,7 +28235,7 @@
           <p:spPr>
             <a:xfrm>
               <a:off x="6515100" y="4445000"/>
-              <a:ext cx="266700" cy="266700"/>
+              <a:ext cx="130178" cy="266700"/>
             </a:xfrm>
             <a:custGeom>
               <a:avLst/>
@@ -37675,13 +36579,13 @@
   <p:clrMapOvr>
     <a:masterClrMapping/>
   </p:clrMapOvr>
-  <mc:AlternateContent xmlns:mc="http://schemas.openxmlformats.org/markup-compatibility/2006">
-    <mc:Choice xmlns:p14="http://schemas.microsoft.com/office/powerpoint/2010/main" Requires="p14">
+  <mc:AlternateContent xmlns:mc="http://schemas.openxmlformats.org/markup-compatibility/2006" xmlns:p14="http://schemas.microsoft.com/office/powerpoint/2010/main">
+    <mc:Choice Requires="p14">
       <p:transition p14:dur="400">
         <p:fade/>
       </p:transition>
     </mc:Choice>
-    <mc:Fallback>
+    <mc:Fallback xmlns="">
       <p:transition>
         <p:fade/>
       </p:transition>
